--- a/docs/presentation/Molinario_Thesis_Defense_2026.pptx
+++ b/docs/presentation/Molinario_Thesis_Defense_2026.pptx
@@ -1102,40 +1102,19 @@
           <a:lstStyle/>
           <a:p>
             <a:r>
-              <a:t>Timing: 0:00–0:30</a:t>
-            </a:r>
-          </a:p>
-          <a:p>
-            <a:r>
+              <a:rPr dirty="0"/>
               <a:t>Good morning. My name is Lello Molinario. This thesis evaluates the robustness of AI-based forensic image-triage tools under adversarial, anti-forensic and out-of-distribution inputs. The goal is not to build a new firearm classifier. The goal is to understand when AI-assisted prioritization can fail, and how those failures can be measured in an auditable way.</a:t>
             </a:r>
-          </a:p>
-          <a:p>
-            <a:r>
-              <a:t>Transition: I will start from the operational risk that motivates the work.</a:t>
-            </a:r>
-          </a:p>
-          <a:p>
-            <a:endParaRPr/>
-          </a:p>
-          <a:p>
-            <a:r>
-              <a:t>[Sources]</a:t>
-            </a:r>
-          </a:p>
-          <a:p>
-            <a:r>
-              <a:t>- docs/LatexThesis/main.tex — official thesis title and degree information</a:t>
-            </a:r>
-          </a:p>
-          <a:p>
-            <a:r>
-              <a:t>- docs/LatexThesis/sections/00_abstract.tex</a:t>
-            </a:r>
-          </a:p>
-          <a:p>
-            <a:r>
-              <a:t>- docs/LatexSlides/assets/logo_RGB.png; theme license in docs/LatexSlides/LICENSE.txt</a:t>
+            <a:endParaRPr lang="it-IT" dirty="0"/>
+          </a:p>
+          <a:p>
+            <a:r>
+              <a:rPr b="1" dirty="0"/>
+              <a:t>Transition</a:t>
+            </a:r>
+            <a:r>
+              <a:rPr dirty="0"/>
+              <a:t>: I will start from the operational risk that motivates the work. </a:t>
             </a:r>
           </a:p>
         </p:txBody>
@@ -1212,45 +1191,18 @@
           <a:lstStyle/>
           <a:p>
             <a:r>
-              <a:t>Timing: 8:05–8:55</a:t>
-            </a:r>
-          </a:p>
-          <a:p>
-            <a:r>
+              <a:rPr dirty="0"/>
               <a:t>Every evaluated system assigns at least some OOD images to the weapon-oriented state. The CLIP proxy reaches 83.6 percent, while the commercial configurations range from 23.8 to 52.2 percent. For CLIP, 500 OOD images are evaluated by five fold-specific checkpoints, so 83.6 percent refers to 2,500 responses. Each commercial rate uses one normalized decision per image. These values are not supervised false-positive rates; they describe closed-set operating behavior.</a:t>
             </a:r>
           </a:p>
           <a:p>
             <a:r>
-              <a:t>Transition: One explainability case shows why even a very concentrated output is not a guarantee.</a:t>
-            </a:r>
-          </a:p>
-          <a:p>
-            <a:endParaRPr/>
-          </a:p>
-          <a:p>
-            <a:r>
-              <a:t>[Sources]</a:t>
-            </a:r>
-          </a:p>
-          <a:p>
-            <a:r>
-              <a:t>- results/metrics/proxy_model_ood_metrics.csv</a:t>
-            </a:r>
-          </a:p>
-          <a:p>
-            <a:r>
-              <a:t>- results/figures/chapter_5/tab_forensic_tools_ood_metrics.csv</a:t>
-            </a:r>
-          </a:p>
-          <a:p>
-            <a:r>
-              <a:t>- docs/LatexThesis/sections/05_implementation.tex — OOD denominator rule</a:t>
-            </a:r>
-          </a:p>
-          <a:p>
-            <a:r>
-              <a:t>- docs/LatexThesis/sections/07_conclusions.tex — RQ1, RQ3 and RQ4</a:t>
+              <a:rPr b="1" dirty="0"/>
+              <a:t>Transition</a:t>
+            </a:r>
+            <a:r>
+              <a:rPr dirty="0"/>
+              <a:t>: One explainability case shows why even a very concentrated output is not a guarantee.</a:t>
             </a:r>
           </a:p>
         </p:txBody>
@@ -1327,50 +1279,18 @@
           <a:lstStyle/>
           <a:p>
             <a:r>
-              <a:t>Timing: 8:55–9:45</a:t>
-            </a:r>
-          </a:p>
-          <a:p>
-            <a:r>
+              <a:rPr dirty="0"/>
               <a:t>In case 0015, the reference class is non-weapon. After Sigma Zero, the proxy predicts weapon with a maximum predicted-class probability of 1.000. Integrated Gradients helps inspect where this selected proxy response is concentrated, but the claim is deliberately limited. The attribution is a qualitative diagnostic. It does not certify correctness, calibrate confidence or explain the internal behavior of a proprietary tool.</a:t>
             </a:r>
           </a:p>
           <a:p>
             <a:r>
-              <a:t>Transition: These findings lead to a clear operational rule.</a:t>
-            </a:r>
-          </a:p>
-          <a:p>
-            <a:endParaRPr/>
-          </a:p>
-          <a:p>
-            <a:r>
-              <a:t>[Sources]</a:t>
-            </a:r>
-          </a:p>
-          <a:p>
-            <a:r>
-              <a:t>- docs/LatexThesis/sections/06_results.tex — maximum-probability adversarial false positive</a:t>
-            </a:r>
-          </a:p>
-          <a:p>
-            <a:r>
-              <a:t>- docs/LatexThesis/images/fig_xai_case5_adversarial_high_conf_failure_input.png</a:t>
-            </a:r>
-          </a:p>
-          <a:p>
-            <a:r>
-              <a:t>- docs/LatexThesis/images/fig_xai_case5_adversarial_high_conf_failure_heatmap.png</a:t>
-            </a:r>
-          </a:p>
-          <a:p>
-            <a:r>
-              <a:t>- docs/LatexThesis/images/fig_xai_case5_adversarial_high_conf_failure_overlay.png</a:t>
-            </a:r>
-          </a:p>
-          <a:p>
-            <a:r>
-              <a:t>- explainability/manifests/chapter5/thesis_selection.csv</a:t>
+              <a:rPr b="1" dirty="0"/>
+              <a:t>Transition</a:t>
+            </a:r>
+            <a:r>
+              <a:rPr dirty="0"/>
+              <a:t>: These findings lead to a clear operational rule.</a:t>
             </a:r>
           </a:p>
         </p:txBody>
@@ -1447,36 +1367,22 @@
           <a:lstStyle/>
           <a:p>
             <a:r>
-              <a:t>Timing: 9:45–10:40</a:t>
-            </a:r>
-          </a:p>
-          <a:p>
-            <a:r>
+              <a:rPr lang="en-US" dirty="0"/>
               <a:t>AI can still be useful, but it should create a prioritized queue rather than an irreversible exclusion. The analyst reviews the context and makes the final decision. Every action should preserve the tool version, configuration, output mapping and validation context. This keeps the efficiency benefit while making the process reviewable and defensible. The practical rule is simple: use AI to prioritize evidence review, never to silently exclude evidence.</a:t>
             </a:r>
           </a:p>
           <a:p>
             <a:r>
-              <a:t>Transition: Before I close, I will state the boundaries that keep this result defensible.</a:t>
-            </a:r>
-          </a:p>
-          <a:p>
-            <a:endParaRPr/>
-          </a:p>
-          <a:p>
-            <a:r>
-              <a:t>[Sources]</a:t>
-            </a:r>
-          </a:p>
-          <a:p>
-            <a:r>
-              <a:t>- docs/LatexThesis/sections/07_conclusions.tex — operational implications and recommendations</a:t>
-            </a:r>
-          </a:p>
-          <a:p>
-            <a:r>
-              <a:t>- docs/LatexThesis/sections/00_abstract.tex — concluding paragraph</a:t>
-            </a:r>
+              <a:rPr b="1" dirty="0"/>
+              <a:t>Transition</a:t>
+            </a:r>
+            <a:r>
+              <a:rPr dirty="0"/>
+              <a:t>: Before I close, I will state the boundaries that keep this result defensible.</a:t>
+            </a:r>
+          </a:p>
+          <a:p>
+            <a:endParaRPr dirty="0"/>
           </a:p>
         </p:txBody>
       </p:sp>
@@ -1552,40 +1458,18 @@
           <a:lstStyle/>
           <a:p>
             <a:r>
-              <a:t>Timing: 10:40–11:25</a:t>
-            </a:r>
-          </a:p>
-          <a:p>
-            <a:r>
+              <a:rPr dirty="0"/>
               <a:t>The strongest limitations are the 1,500-image single-reviewer corpus, one frozen parameter setting per perturbation, direct attacks only on EfficientNet-B0, and version-dependent black-box outputs. Fifteen of 11,500 files matched a predefined sensitive metadata term. Leave-out differences were small, but this does not prove causal irrelevance for every decision. The work makes no legal-admissibility, certification or universal-ranking claim.</a:t>
             </a:r>
           </a:p>
           <a:p>
             <a:r>
-              <a:t>Transition: I will finish with three points to remember.</a:t>
-            </a:r>
-          </a:p>
-          <a:p>
-            <a:endParaRPr/>
-          </a:p>
-          <a:p>
-            <a:r>
-              <a:t>[Sources]</a:t>
-            </a:r>
-          </a:p>
-          <a:p>
-            <a:r>
-              <a:t>- results/figures/chapter_5/embedded_metadata_sensitivity_summary.json</a:t>
-            </a:r>
-          </a:p>
-          <a:p>
-            <a:r>
-              <a:t>- docs/LatexThesis/sections/06_results.tex</a:t>
-            </a:r>
-          </a:p>
-          <a:p>
-            <a:r>
-              <a:t>- docs/LatexThesis/sections/07_conclusions.tex</a:t>
+              <a:rPr b="1" dirty="0"/>
+              <a:t>Transition</a:t>
+            </a:r>
+            <a:r>
+              <a:rPr dirty="0"/>
+              <a:t>: I will finish with three points to remember.</a:t>
             </a:r>
           </a:p>
         </p:txBody>
@@ -1662,43 +1546,31 @@
           <a:lstStyle/>
           <a:p>
             <a:r>
-              <a:t>Timing: 11:25–12:15</a:t>
-            </a:r>
-          </a:p>
-          <a:p>
-            <a:r>
-              <a:t>First, clean performance is only a baseline; robustness depends on the condition. Second, direct attacks, empirical transfer, OOD behavior and configuration trade-offs are distinct dimensions and must not be mixed. Third, FAIRLab makes those dimensions traceable, auditable and reviewable by a forensic expert. The final message is: AI can prioritize evidence, but it must not silently exclude it. Thank you. I am happy to take your questions.</a:t>
-            </a:r>
-          </a:p>
-          <a:p>
-            <a:endParaRPr/>
-          </a:p>
-          <a:p>
-            <a:r>
+              <a:rPr dirty="0"/>
+              <a:t>First, clean performance is only a baseline; robustness depends on the condition. Second, direct attacks, empirical transfer, OOD behavior and configuration trade-offs are distinct dimensions and must not be mixed. Third, </a:t>
+            </a:r>
+            <a:r>
+              <a:rPr dirty="0" err="1"/>
+              <a:t>FAIRLab</a:t>
+            </a:r>
+            <a:r>
+              <a:rPr dirty="0"/>
+              <a:t> makes those dimensions traceable, auditable and reviewable by a forensic expert. The final message is: AI can prioritize evidence, but it must not silently exclude it. Thank you. I am happy to take your questions.</a:t>
+            </a:r>
+          </a:p>
+          <a:p>
+            <a:endParaRPr dirty="0"/>
+          </a:p>
+          <a:p>
+            <a:r>
+              <a:rPr dirty="0"/>
               <a:t>Backup map for Presenter View:</a:t>
             </a:r>
           </a:p>
           <a:p>
             <a:r>
+              <a:rPr dirty="0"/>
               <a:t>B1 formal research questions · B2 perturbation overview · B3 traceability · B4 exact commercial metrics · B5 adversarial parameters · B6 anti-forensic parameters · B7 output normalization · B8 formulas and denominators · B9 limitations and future validation.</a:t>
-            </a:r>
-          </a:p>
-          <a:p>
-            <a:endParaRPr/>
-          </a:p>
-          <a:p>
-            <a:r>
-              <a:t>[Sources]</a:t>
-            </a:r>
-          </a:p>
-          <a:p>
-            <a:r>
-              <a:t>- docs/LatexThesis/sections/07_conclusions.tex</a:t>
-            </a:r>
-          </a:p>
-          <a:p>
-            <a:r>
-              <a:t>- docs/LatexSlides/assets/logo_RGB.png; theme license in docs/LatexSlides/LICENSE.txt</a:t>
             </a:r>
           </a:p>
         </p:txBody>
@@ -1775,30 +1647,30 @@
           <a:lstStyle/>
           <a:p>
             <a:r>
+              <a:rPr dirty="0"/>
               <a:t>Backup B1 · Research questions</a:t>
             </a:r>
           </a:p>
           <a:p>
             <a:r>
-              <a:t>Use this slide if the commission asks how the thesis claims map to the formal research questions. Answer briefly: RQ1 covers clean, OOD, adversarial and anti-forensic behavior of the proxies; RQ2 separates direct attack, transfer and model-agnostic conditions; RQ3 concerns black-box outputs and configuration profiles; RQ4 connects directional errors and OOD routing to continued human review. Repeat that the assessment is protocol-specific, not certification or legal validation.</a:t>
-            </a:r>
-          </a:p>
-          <a:p>
-            <a:endParaRPr/>
-          </a:p>
-          <a:p>
-            <a:r>
-              <a:t>[Sources]</a:t>
-            </a:r>
-          </a:p>
-          <a:p>
-            <a:r>
-              <a:t>- docs/LatexThesis/sections/01_introduction.tex — Research Questions</a:t>
-            </a:r>
-          </a:p>
-          <a:p>
-            <a:r>
-              <a:t>- docs/LatexThesis/sections/07_conclusions.tex — Answers to the Research Questions</a:t>
+              <a:rPr lang="en-US" dirty="0"/>
+              <a:t>if the commission asks how the thesis claims map to the formal research questions</a:t>
+            </a:r>
+            <a:r>
+              <a:rPr lang="it-IT" dirty="0"/>
+              <a:t>. </a:t>
+            </a:r>
+            <a:r>
+              <a:rPr dirty="0"/>
+              <a:t>Answer briefly:</a:t>
+            </a:r>
+            <a:r>
+              <a:rPr lang="it-IT" dirty="0"/>
+              <a:t> </a:t>
+            </a:r>
+            <a:r>
+              <a:rPr dirty="0"/>
+              <a:t>RQ1 covers clean, OOD, adversarial and anti-forensic behavior of the proxies; RQ2 separates direct attack, transfer and model-agnostic conditions; RQ3 concerns black-box outputs and configuration profiles; RQ4 connects directional errors and OOD routing to continued human review. Repeat that the assessment is protocol-specific, not certification or legal validation.</a:t>
             </a:r>
           </a:p>
         </p:txBody>
@@ -1875,36 +1747,33 @@
           <a:lstStyle/>
           <a:p>
             <a:r>
+              <a:rPr dirty="0"/>
               <a:t>Backup B2 · Perturbation suite</a:t>
             </a:r>
           </a:p>
           <a:p>
             <a:r>
-              <a:t>Use this slide if the commission asks which conditions were evaluated. The adversarial or adversarial-style group includes FGSM, One Pixel, Sigma Zero, SuperDeepFool and deterministic model-agnostic Color Shift. The anti-forensic group includes JPEG recompression, resampling, Gaussian blur, histogram modification and contrast stretching. Stress again that model-dependent attacks are direct only on EfficientNet-B0 and are transfer tests elsewhere.</a:t>
-            </a:r>
-          </a:p>
-          <a:p>
-            <a:endParaRPr/>
-          </a:p>
-          <a:p>
-            <a:r>
-              <a:t>[Sources]</a:t>
-            </a:r>
-          </a:p>
-          <a:p>
-            <a:r>
-              <a:t>- docs/LatexThesis/sections/04_methodology.tex — perturbation definitions</a:t>
-            </a:r>
-          </a:p>
-          <a:p>
-            <a:r>
-              <a:t>- attacks/manifests/README.md</a:t>
-            </a:r>
-          </a:p>
-          <a:p>
-            <a:r>
-              <a:t>- docs/LatexThesis/sections/07_conclusions.tex — RQ2</a:t>
-            </a:r>
+              <a:rPr lang="it-IT"/>
+              <a:t>Use this slide </a:t>
+            </a:r>
+            <a:r>
+              <a:t>if </a:t>
+            </a:r>
+            <a:r>
+              <a:rPr dirty="0"/>
+              <a:t>the commission asks which conditions were evaluated. The adversarial or adversarial-style group includes FGSM, One Pixel, Sigma Zero, </a:t>
+            </a:r>
+            <a:r>
+              <a:rPr dirty="0" err="1"/>
+              <a:t>SuperDeepFool</a:t>
+            </a:r>
+            <a:r>
+              <a:rPr dirty="0"/>
+              <a:t> and deterministic model-agnostic Color Shift. The anti-forensic group includes JPEG recompression, resampling, Gaussian blur, histogram modification and contrast stretching. Stress again that model-dependent attacks are direct only on EfficientNet-B0 and are transfer tests elsewhere.</a:t>
+            </a:r>
+          </a:p>
+          <a:p>
+            <a:endParaRPr dirty="0"/>
           </a:p>
         </p:txBody>
       </p:sp>
@@ -1980,40 +1849,14 @@
           <a:lstStyle/>
           <a:p>
             <a:r>
+              <a:rPr dirty="0"/>
               <a:t>Backup B3 · Traceability and reproducibility</a:t>
             </a:r>
           </a:p>
           <a:p>
             <a:r>
-              <a:t>Use this slide if the commission asks how a reported number can be audited. Start from the source manifest, follow the source-condition identifier to the derived file, then to the proxy or tool output, the normalized operational state, the metric table and the final figure. SHA-256 digests, frozen registries and explicit mapping rules protect this chain.</a:t>
-            </a:r>
-          </a:p>
-          <a:p>
-            <a:endParaRPr/>
-          </a:p>
-          <a:p>
-            <a:r>
-              <a:t>[Sources]</a:t>
-            </a:r>
-          </a:p>
-          <a:p>
-            <a:r>
-              <a:t>- docs/artifact/THESIS_ARTIFACT.md</a:t>
-            </a:r>
-          </a:p>
-          <a:p>
-            <a:r>
-              <a:t>- docs/artifact/REPRODUCIBILITY.md</a:t>
-            </a:r>
-          </a:p>
-          <a:p>
-            <a:r>
-              <a:t>- docs/artifact/CONTROLLED_ARTIFACT_CHECKSUMS.sha256</a:t>
-            </a:r>
-          </a:p>
-          <a:p>
-            <a:r>
-              <a:t>- docs/LatexThesis/sections/05_implementation.tex — traceability and integrity controls</a:t>
+              <a:rPr dirty="0"/>
+              <a:t>if the commission asks how a reported number can be audited. Start from the source manifest, follow the source-condition identifier to the derived file, then to the proxy or tool output, the normalized operational state, the metric table and the final figure. SHA-256 digests, frozen registries and explicit mapping rules protect this chain.</a:t>
             </a:r>
           </a:p>
         </p:txBody>
@@ -2090,30 +1933,22 @@
           <a:lstStyle/>
           <a:p>
             <a:r>
+              <a:rPr dirty="0"/>
               <a:t>Backup B4 · Exact commercial metrics</a:t>
             </a:r>
           </a:p>
           <a:p>
             <a:r>
-              <a:t>Use this table only for a numerical question about one commercial configuration. Keep clean binary metrics and OOD routing separate. The strongest clean accuracy in this frozen comparison is 97.8 percent for Griffeye/T3K, but the rows are operating profiles under specific versions and settings; they do not establish a general product ranking.</a:t>
-            </a:r>
-          </a:p>
-          <a:p>
-            <a:endParaRPr/>
-          </a:p>
-          <a:p>
-            <a:r>
-              <a:t>[Sources]</a:t>
-            </a:r>
-          </a:p>
-          <a:p>
-            <a:r>
-              <a:t>- results/figures/chapter_5/tab_forensic_tools_clean_metrics.csv</a:t>
-            </a:r>
-          </a:p>
-          <a:p>
-            <a:r>
-              <a:t>- results/figures/chapter_5/tab_forensic_tools_ood_metrics.csv</a:t>
+              <a:rPr dirty="0"/>
+              <a:t>Use this table only for a numerical question about one commercial configuration. Keep clean binary metrics and OOD routing separate. The strongest clean accuracy in this frozen comparison is 97.8 percent for </a:t>
+            </a:r>
+            <a:r>
+              <a:rPr dirty="0" err="1"/>
+              <a:t>Griffeye</a:t>
+            </a:r>
+            <a:r>
+              <a:rPr dirty="0"/>
+              <a:t>/T3K, but the rows are operating profiles under specific versions and settings; they do not establish a general product ranking.</a:t>
             </a:r>
           </a:p>
         </p:txBody>
@@ -2190,30 +2025,30 @@
           <a:lstStyle/>
           <a:p>
             <a:r>
+              <a:rPr dirty="0"/>
               <a:t>Backup B5 · Frozen adversarial settings</a:t>
             </a:r>
           </a:p>
           <a:p>
             <a:r>
-              <a:t>Use this slide if the commission asks whether the attacks were reproducible or which parameters were fixed. FGSM is untargeted with ε = 8/255 in pixel space. One Pixel uses Differential Evolution over x, y, R, G and B, with 50 iterations, an effective population of approximately 100, seed 42 and early stopping after misclassification. Sigma Zero uses 1,000 steps, η₀ = 1.0, σ = 0.001 and τ₀ = 0.3. SuperDeepFool uses SDF(∞,1), 20 outer iterations, 50 DeepFool iterations and one projection step. All model-dependent conditions target the fold-aware EfficientNet-B0 checkpoint. Color Shift is model-agnostic.</a:t>
-            </a:r>
-          </a:p>
-          <a:p>
-            <a:endParaRPr/>
-          </a:p>
-          <a:p>
-            <a:r>
-              <a:t>[Sources]</a:t>
-            </a:r>
-          </a:p>
-          <a:p>
-            <a:r>
-              <a:t>- docs/LatexThesis/sections/05_implementation.tex — Table: Frozen adversarial and adversarial-style generation parameters</a:t>
-            </a:r>
-          </a:p>
-          <a:p>
-            <a:r>
-              <a:t>- attacks/manifests/README.md</a:t>
+              <a:rPr dirty="0"/>
+              <a:t>if the commission asks whether the attacks were reproducible or which parameters were fixed. FGSM is untargeted with ε = 8/255 in pixel space. One Pixel uses Differential Evolution over x, y, R, G and B, with 50 iterations, an effective population of approximately 100, seed 42 and early stopping after misclassification. Sigma Zero uses 1,000 steps, η₀ = 1.0, σ = 0.001 and τ₀ = 0.3. </a:t>
+            </a:r>
+            <a:r>
+              <a:rPr dirty="0" err="1"/>
+              <a:t>SuperDeepFool</a:t>
+            </a:r>
+            <a:r>
+              <a:rPr dirty="0"/>
+              <a:t> uses SDF(∞,1), 20 outer iterations, 50 </a:t>
+            </a:r>
+            <a:r>
+              <a:rPr dirty="0" err="1"/>
+              <a:t>DeepFool</a:t>
+            </a:r>
+            <a:r>
+              <a:rPr dirty="0"/>
+              <a:t> iterations and one projection step. All model-dependent conditions target the fold-aware EfficientNet-B0 checkpoint. Color Shift is model-agnostic.</a:t>
             </a:r>
           </a:p>
         </p:txBody>
@@ -2289,37 +2124,34 @@
           <a:bodyPr/>
           <a:lstStyle/>
           <a:p>
-            <a:r>
-              <a:t>Timing: 0:30–1:25</a:t>
-            </a:r>
-          </a:p>
-          <a:p>
-            <a:r>
+            <a:endParaRPr dirty="0"/>
+          </a:p>
+          <a:p>
+            <a:r>
+              <a:rPr dirty="0"/>
               <a:t>Digital investigations may contain very large image collections, so AI can help decide what an analyst reviews first. The risk is asymmetric. A false positive creates extra work, but a false negative can quietly move relevant evidence out of the priority queue. My central question is therefore: how does forensic image triage behave under adversarial, anti-forensic and out-of-distribution inputs? The contribution is an auditable robustness assessment, not a new classifier.</a:t>
             </a:r>
           </a:p>
           <a:p>
             <a:r>
-              <a:t>Transition: To answer this question, I designed the FAIRLab protocol.</a:t>
-            </a:r>
-          </a:p>
-          <a:p>
-            <a:endParaRPr/>
-          </a:p>
-          <a:p>
-            <a:r>
-              <a:t>[Sources]</a:t>
-            </a:r>
-          </a:p>
-          <a:p>
-            <a:r>
-              <a:t>- docs/LatexThesis/sections/01_introduction.tex</a:t>
-            </a:r>
-          </a:p>
-          <a:p>
-            <a:r>
-              <a:t>- docs/LatexThesis/sections/04_methodology.tex</a:t>
-            </a:r>
+              <a:rPr b="1" dirty="0"/>
+              <a:t>Transition</a:t>
+            </a:r>
+            <a:r>
+              <a:rPr dirty="0"/>
+              <a:t>: To answer this question, I designed the </a:t>
+            </a:r>
+            <a:r>
+              <a:rPr dirty="0" err="1"/>
+              <a:t>FAIRLab</a:t>
+            </a:r>
+            <a:r>
+              <a:rPr dirty="0"/>
+              <a:t> protocol.</a:t>
+            </a:r>
+          </a:p>
+          <a:p>
+            <a:endParaRPr dirty="0"/>
           </a:p>
         </p:txBody>
       </p:sp>
@@ -2395,25 +2227,30 @@
           <a:lstStyle/>
           <a:p>
             <a:r>
+              <a:rPr dirty="0"/>
               <a:t>Backup B6 · Frozen anti-forensic settings</a:t>
             </a:r>
           </a:p>
           <a:p>
             <a:r>
-              <a:t>Use this slide if the commission asks how the anti-forensic transformations were controlled. JPEG recompression uses quality 70 without changing dimensions. Resize downsamples to 50 percent and restores the original dimensions with bicubic interpolation. Gaussian blur uses radius 1.5. Histogram modification applies per-channel equalization, while contrast stretching uses autocontrast with a 1 percent cutoff. The four transformations other than the dedicated recompression condition are serialized at JPEG quality 95. Each condition is model-agnostic and uses one frozen setting.</a:t>
-            </a:r>
-          </a:p>
-          <a:p>
-            <a:endParaRPr/>
-          </a:p>
-          <a:p>
-            <a:r>
-              <a:t>[Sources]</a:t>
-            </a:r>
-          </a:p>
-          <a:p>
-            <a:r>
-              <a:t>- docs/LatexThesis/sections/05_implementation.tex — Table: Frozen anti-forensic transformation parameters</a:t>
+              <a:rPr dirty="0"/>
+              <a:t>if the commission asks how the anti-forensic transformations were controlled. JPEG recompression uses quality 70 without changing dimensions. Resize </a:t>
+            </a:r>
+            <a:r>
+              <a:rPr dirty="0" err="1"/>
+              <a:t>downsamples</a:t>
+            </a:r>
+            <a:r>
+              <a:rPr dirty="0"/>
+              <a:t> to 50 percent and restores the original dimensions with bicubic interpolation. Gaussian blur uses radius 1.5. Histogram modification applies per-channel equalization, while contrast stretching uses </a:t>
+            </a:r>
+            <a:r>
+              <a:rPr dirty="0" err="1"/>
+              <a:t>autocontrast</a:t>
+            </a:r>
+            <a:r>
+              <a:rPr dirty="0"/>
+              <a:t> with a 1 percent cutoff. The four transformations other than the dedicated recompression condition are serialized at JPEG quality 95. Each condition is model-agnostic and uses one frozen setting.</a:t>
             </a:r>
           </a:p>
         </p:txBody>
@@ -2490,30 +2327,38 @@
           <a:lstStyle/>
           <a:p>
             <a:r>
+              <a:rPr dirty="0"/>
               <a:t>Backup B7 · Black-box output normalization</a:t>
             </a:r>
           </a:p>
           <a:p>
             <a:r>
-              <a:t>Use this slide if the commission asks how unlike commercial outputs were made comparable. Magnet uses its Possible weapons tag; Griffeye/T3K uses the CORE/Violence/Firearm bookmark; Excire uses membership in at least one of eight frozen firearm-oriented prompt hit lists, keeping D20, D50 and D80 separate; Cellebrite uses the Armi, Pistola or Fucile classifications. The frozen rules convert observable states to true, false or unsupported, and then to weapon, non_weapon or unknown. Unsupported values are never silently treated as negative. No unknown decision occurred in the final 69,000-row population.</a:t>
-            </a:r>
-          </a:p>
-          <a:p>
-            <a:endParaRPr/>
-          </a:p>
-          <a:p>
-            <a:r>
-              <a:t>[Sources]</a:t>
-            </a:r>
-          </a:p>
-          <a:p>
-            <a:r>
-              <a:t>- docs/LatexThesis/sections/05_implementation.tex — Output Matching and Normalization; frozen mapping table</a:t>
-            </a:r>
-          </a:p>
-          <a:p>
-            <a:r>
-              <a:t>- evaluation/forensic_tools/normalized_predictions_public_summary.json</a:t>
+              <a:rPr dirty="0"/>
+              <a:t>if the commission asks how unlike commercial outputs were made comparable. Magnet uses its Possible weapons tag; </a:t>
+            </a:r>
+            <a:r>
+              <a:rPr dirty="0" err="1"/>
+              <a:t>Griffeye</a:t>
+            </a:r>
+            <a:r>
+              <a:rPr dirty="0"/>
+              <a:t>/T3K uses the CORE/Violence/Firearm bookmark; </a:t>
+            </a:r>
+            <a:r>
+              <a:rPr dirty="0" err="1"/>
+              <a:t>Excire</a:t>
+            </a:r>
+            <a:r>
+              <a:rPr dirty="0"/>
+              <a:t> uses membership in at least one of eight frozen firearm-oriented prompt hit lists, keeping D20, D50 and D80 separate; Cellebrite uses the Armi, Pistola or Fucile classifications. The frozen rules convert observable states to true, false or unsupported, and then to weapon, </a:t>
+            </a:r>
+            <a:r>
+              <a:rPr dirty="0" err="1"/>
+              <a:t>non_weapon</a:t>
+            </a:r>
+            <a:r>
+              <a:rPr dirty="0"/>
+              <a:t> or unknown. Unsupported values are never silently treated as negative. No unknown decision occurred in the final 69,000-row population.</a:t>
             </a:r>
           </a:p>
         </p:txBody>
@@ -2590,31 +2435,34 @@
           <a:lstStyle/>
           <a:p>
             <a:r>
+              <a:rPr dirty="0"/>
               <a:t>Backup B8 · Metric formulas and denominators</a:t>
             </a:r>
           </a:p>
           <a:p>
             <a:r>
-              <a:t>Use this slide for a question about metric interpretation. Accuracy summarizes correct binary decisions. FNR is FN divided by TP plus FN and corresponds to missed-target risk. FPR is FP divided by FP plus TN and corresponds to additional review workload. OOD weapon assignment is reported separately because OOD images do not belong to the supervised weapon/non-weapon task. Proxy OOD values aggregate five fold-specific responses for each of 500 images, so the denominator is 2,500. Each commercial configuration produces one decision per OOD image, so its denominator is 500. Unknown outputs are excluded from binary denominators and reported separately.</a:t>
-            </a:r>
-          </a:p>
-          <a:p>
-            <a:endParaRPr/>
-          </a:p>
-          <a:p>
-            <a:r>
-              <a:t>[Sources]</a:t>
-            </a:r>
-          </a:p>
-          <a:p>
-            <a:r>
-              <a:t>- docs/LatexThesis/sections/05_implementation.tex — metric computation and OOD denominator rule</a:t>
-            </a:r>
-          </a:p>
-          <a:p>
-            <a:r>
-              <a:t>- docs/LatexThesis/sections/06_results.tex — reported metric definitions</a:t>
-            </a:r>
+              <a:rPr lang="it-IT" dirty="0" err="1"/>
+              <a:t>If</a:t>
+            </a:r>
+            <a:r>
+              <a:rPr lang="it-IT" dirty="0"/>
+              <a:t> the commissione </a:t>
+            </a:r>
+            <a:r>
+              <a:rPr lang="it-IT" dirty="0" err="1"/>
+              <a:t>asks</a:t>
+            </a:r>
+            <a:r>
+              <a:rPr lang="it-IT" dirty="0"/>
+              <a:t> </a:t>
+            </a:r>
+            <a:r>
+              <a:rPr dirty="0"/>
+              <a:t>for a question about metric interpretation. Accuracy summarizes correct binary decisions. FNR is FN divided by TP plus FN and corresponds to missed-target risk. FPR is FP divided by FP plus TN and corresponds to additional review workload. OOD weapon assignment is reported separately because OOD images do not belong to the supervised weapon/non-weapon task. Proxy OOD values aggregate five fold-specific responses for each of 500 images, so the denominator is 2,500. Each commercial configuration produces one decision per OOD image, so its denominator is 500. Unknown outputs are excluded from binary denominators and reported separately.</a:t>
+            </a:r>
+          </a:p>
+          <a:p>
+            <a:endParaRPr dirty="0"/>
           </a:p>
         </p:txBody>
       </p:sp>
@@ -2690,31 +2538,18 @@
           <a:lstStyle/>
           <a:p>
             <a:r>
+              <a:rPr dirty="0"/>
               <a:t>Backup B9 · Limitations and future validation</a:t>
             </a:r>
           </a:p>
           <a:p>
             <a:r>
-              <a:t>Use this slide if the commission asks how the work should be extended. The next step is not merely to seek higher accuracy. It is to test whether the observed operating profiles remain stable across larger and more heterogeneous multi-reviewer datasets, parameter sweeps and adaptive attacks, repeated commercial-tool versions, additional media modalities and stronger audit controls. These directions address the current boundaries without changing the central requirement: every extension must remain traceable and reviewable by a forensic expert.</a:t>
-            </a:r>
-          </a:p>
-          <a:p>
-            <a:endParaRPr/>
-          </a:p>
-          <a:p>
-            <a:r>
-              <a:t>[Sources]</a:t>
-            </a:r>
-          </a:p>
-          <a:p>
-            <a:r>
-              <a:t>- docs/LatexThesis/sections/07_conclusions.tex — limitations and future work</a:t>
-            </a:r>
-          </a:p>
-          <a:p>
-            <a:r>
-              <a:t>- docs/LatexThesis/sections/04_methodology.tex — protocol scope</a:t>
-            </a:r>
+              <a:rPr dirty="0"/>
+              <a:t>if the commission asks how the work should be extended. The next step is not merely to seek higher accuracy. It is to test whether the observed operating profiles remain stable across larger and more heterogeneous multi-reviewer datasets, parameter sweeps and adaptive attacks, repeated commercial-tool versions, additional media modalities and stronger audit controls. These directions address the current boundaries without changing the central requirement: every extension must remain traceable and reviewable by a forensic expert.</a:t>
+            </a:r>
+          </a:p>
+          <a:p>
+            <a:endParaRPr dirty="0"/>
           </a:p>
         </p:txBody>
       </p:sp>
@@ -2790,35 +2625,22 @@
           <a:lstStyle/>
           <a:p>
             <a:r>
-              <a:t>Timing: 1:25–2:20</a:t>
-            </a:r>
-          </a:p>
-          <a:p>
-            <a:r>
-              <a:t>FAIRLab connects six stages. I start from a heterogeneous image pool, validate and deduplicate it, and freeze 1,500 source images. I generate controlled perturbations, evaluate three transparent proxies and six commercial configurations, normalize the observable outputs, and interpret the results in forensic terms. Traceability runs through the complete process with identifiers, manifests, checksums, frozen configurations and source-to-output links.</a:t>
-            </a:r>
-          </a:p>
-          <a:p>
-            <a:r>
-              <a:t>Transition: This is the exact population behind every comparison.</a:t>
-            </a:r>
-          </a:p>
-          <a:p>
-            <a:endParaRPr/>
-          </a:p>
-          <a:p>
-            <a:r>
-              <a:t>[Sources]</a:t>
-            </a:r>
-          </a:p>
-          <a:p>
-            <a:r>
-              <a:t>- docs/LatexThesis/sections/04_methodology.tex</a:t>
-            </a:r>
-          </a:p>
-          <a:p>
-            <a:r>
-              <a:t>- docs/LatexThesis/sections/05_implementation.tex</a:t>
+              <a:rPr dirty="0" err="1"/>
+              <a:t>FAIRLab</a:t>
+            </a:r>
+            <a:r>
+              <a:rPr dirty="0"/>
+              <a:t> connects six stages. I start from a heterogeneous image pool, validate and deduplicate it, and freeze 1,500 source images. I generate controlled perturbations, evaluate three transparent proxies and six commercial configurations, normalize the observable outputs, and interpret the results in forensic terms. Traceability runs through the complete process with identifiers, manifests, checksums, frozen configurations and source-to-output links.</a:t>
+            </a:r>
+          </a:p>
+          <a:p>
+            <a:r>
+              <a:rPr b="1" dirty="0"/>
+              <a:t>Transition</a:t>
+            </a:r>
+            <a:r>
+              <a:rPr dirty="0"/>
+              <a:t>: This is the exact population behind every comparison.</a:t>
             </a:r>
           </a:p>
         </p:txBody>
@@ -2895,35 +2717,22 @@
           <a:lstStyle/>
           <a:p>
             <a:r>
-              <a:t>Timing: 2:20–3:10</a:t>
-            </a:r>
-          </a:p>
-          <a:p>
-            <a:r>
-              <a:t>The frozen population contains 1,500 source images: 500 weapon, 500 non-weapon and 500 images in a separate OOD branch. The 1,000 binary images produce ten linked variants each, for 10,000 adversarial and anti-forensic files. Together with the clean sources, the tool-facing bundle contains 11,500 files. The variants remain linked to their sources; they are not 10,000 independent cases. OOD is evaluated separately, not as a third supervised class.</a:t>
-            </a:r>
-          </a:p>
-          <a:p>
-            <a:r>
-              <a:t>Transition: I used this same frozen population at two evidence levels.</a:t>
-            </a:r>
-          </a:p>
-          <a:p>
-            <a:endParaRPr/>
-          </a:p>
-          <a:p>
-            <a:r>
-              <a:t>[Sources]</a:t>
-            </a:r>
-          </a:p>
-          <a:p>
-            <a:r>
-              <a:t>- docs/LatexThesis/sections/04_methodology.tex</a:t>
-            </a:r>
-          </a:p>
-          <a:p>
-            <a:r>
-              <a:t>- docs/LatexThesis/sections/05_implementation.tex</a:t>
+              <a:rPr lang="it-IT" dirty="0"/>
+              <a:t>T</a:t>
+            </a:r>
+            <a:r>
+              <a:rPr dirty="0"/>
+              <a:t>he frozen population contains 1,500 source images: 500 weapon, 500 non-weapon and 500 images in a separate OOD branch. The 1,000 binary images produce ten linked variants each, for 10,000 adversarial and anti-forensic files. Together with the clean sources, the tool-facing bundle contains 11,500 files. The variants remain linked to their sources; they are not 10,000 independent cases. OOD is evaluated separately, not as a third supervised class.</a:t>
+            </a:r>
+          </a:p>
+          <a:p>
+            <a:r>
+              <a:rPr b="1" dirty="0"/>
+              <a:t>Transition</a:t>
+            </a:r>
+            <a:r>
+              <a:rPr dirty="0"/>
+              <a:t>: I used this same frozen population at two evidence levels.</a:t>
             </a:r>
           </a:p>
         </p:txBody>
@@ -3000,45 +2809,18 @@
           <a:lstStyle/>
           <a:p>
             <a:r>
-              <a:t>Timing: 3:10–4:05</a:t>
-            </a:r>
-          </a:p>
-          <a:p>
-            <a:r>
+              <a:rPr dirty="0"/>
               <a:t>The first evidence level uses transparent proxy models: EfficientNet-B0, ResNet18 and a CLIP-based proxy. Here I can inspect predictions, gradients and fold-aware checkpoints. The second level uses four commercial black-box systems in six configurations, where only analyst-visible outputs are available. The threat model is essential: model-dependent attacks are direct only on EfficientNet-B0. On every other system, the same files measure empirical transfer. Color Shift and the five anti-forensic transformations are model-agnostic conditions.</a:t>
             </a:r>
           </a:p>
           <a:p>
             <a:r>
-              <a:t>Transition: Different outputs can be compared only after an explicit normalization step.</a:t>
-            </a:r>
-          </a:p>
-          <a:p>
-            <a:endParaRPr/>
-          </a:p>
-          <a:p>
-            <a:r>
-              <a:t>[Sources]</a:t>
-            </a:r>
-          </a:p>
-          <a:p>
-            <a:r>
-              <a:t>- docs/LatexThesis/sections/00_abstract.tex</a:t>
-            </a:r>
-          </a:p>
-          <a:p>
-            <a:r>
-              <a:t>- docs/LatexThesis/sections/04_methodology.tex — evaluated systems and attack pathways</a:t>
-            </a:r>
-          </a:p>
-          <a:p>
-            <a:r>
-              <a:t>- evaluation/forensic_tools/tool_version_log.csv</a:t>
-            </a:r>
-          </a:p>
-          <a:p>
-            <a:r>
-              <a:t>- models/model_registry.json</a:t>
+              <a:rPr b="1" dirty="0"/>
+              <a:t>Transition</a:t>
+            </a:r>
+            <a:r>
+              <a:rPr dirty="0"/>
+              <a:t>: Different outputs can be compared only after an explicit normalization step.</a:t>
             </a:r>
           </a:p>
         </p:txBody>
@@ -3115,40 +2897,18 @@
           <a:lstStyle/>
           <a:p>
             <a:r>
-              <a:t>Timing: 4:05–4:50</a:t>
-            </a:r>
-          </a:p>
-          <a:p>
-            <a:r>
+              <a:rPr dirty="0"/>
               <a:t>Commercial tools expose tags, bookmarks, labels or retrieval results rather than one common prediction interface. I therefore freeze a mapping for every tool version and configuration and normalize each output into weapon, non-weapon or unknown. This makes directional errors comparable. The false-negative rate represents missed-target risk; the false-positive rate represents review workload. OOD weapon assignment is reported separately. No unknown state occurred in the 69,000 normalized commercial decisions, but the protocol keeps that state explicit.</a:t>
             </a:r>
           </a:p>
           <a:p>
             <a:r>
-              <a:t>Transition: With the comparison rules fixed, we can now examine the main results.</a:t>
-            </a:r>
-          </a:p>
-          <a:p>
-            <a:endParaRPr/>
-          </a:p>
-          <a:p>
-            <a:r>
-              <a:t>[Sources]</a:t>
-            </a:r>
-          </a:p>
-          <a:p>
-            <a:r>
-              <a:t>- docs/LatexThesis/sections/05_implementation.tex — output normalization</a:t>
-            </a:r>
-          </a:p>
-          <a:p>
-            <a:r>
-              <a:t>- docs/LatexThesis/sections/06_results.tex — metric definitions and decision counts</a:t>
-            </a:r>
-          </a:p>
-          <a:p>
-            <a:r>
-              <a:t>- evaluation/forensic_tools/normalized_predictions_public_summary.json</a:t>
+              <a:rPr b="1" dirty="0"/>
+              <a:t>Transition</a:t>
+            </a:r>
+            <a:r>
+              <a:rPr dirty="0"/>
+              <a:t>: With the comparison rules fixed, we can now examine the main results.</a:t>
             </a:r>
           </a:p>
         </p:txBody>
@@ -3225,40 +2985,18 @@
           <a:lstStyle/>
           <a:p>
             <a:r>
-              <a:t>Timing: 4:50–5:55</a:t>
-            </a:r>
-          </a:p>
-          <a:p>
-            <a:r>
+              <a:rPr dirty="0"/>
               <a:t>EfficientNet-B0 reaches 97.8 percent clean accuracy. Under the strongest direct Sigma Zero condition, it falls to 1.5 percent: a drop of 96.3 percentage points. The same generated artifacts do not transfer uniformly. The worst transferred accuracies are 91.8 percent for ResNet18 and 91.4 percent for CLIP. These are different claims: the first is direct-target vulnerability; the others are empirical transfer. Aggregate anti-forensic effects are smaller, with a largest proxy drop of 3.0 points, but directional errors still matter.</a:t>
             </a:r>
           </a:p>
           <a:p>
             <a:r>
-              <a:t>Transition: The commercial-tool heatmap shows that transfer is also configuration-dependent.</a:t>
-            </a:r>
-          </a:p>
-          <a:p>
-            <a:endParaRPr/>
-          </a:p>
-          <a:p>
-            <a:r>
-              <a:t>[Sources]</a:t>
-            </a:r>
-          </a:p>
-          <a:p>
-            <a:r>
-              <a:t>- results/metrics/proxy_model_clean_metrics.csv</a:t>
-            </a:r>
-          </a:p>
-          <a:p>
-            <a:r>
-              <a:t>- results/metrics/proxy_model_adversarial_metrics.csv</a:t>
-            </a:r>
-          </a:p>
-          <a:p>
-            <a:r>
-              <a:t>- results/metrics/proxy_model_anti_forensic_metrics.csv</a:t>
+              <a:rPr b="1" dirty="0"/>
+              <a:t>Transition</a:t>
+            </a:r>
+            <a:r>
+              <a:rPr dirty="0"/>
+              <a:t>: The commercial-tool heatmap shows that transfer is also configuration-dependent.</a:t>
             </a:r>
           </a:p>
         </p:txBody>
@@ -3335,40 +3073,34 @@
           <a:lstStyle/>
           <a:p>
             <a:r>
-              <a:t>Timing: 5:55–7:00</a:t>
-            </a:r>
-          </a:p>
-          <a:p>
-            <a:r>
-              <a:t>This heatmap is the clearest publication visual for black-box transfer. I would not read every cell. The message is heterogeneity: the same EfficientNet-generated artifacts have different effects across tools and across settings of the same tool. The largest observed effects are Sigma Zero transfers on Excire D50 and D80, with drops of 20.2 and 25.8 percentage points. These are transfer results, not direct attacks on proprietary models, and they do not create a product ranking.</a:t>
-            </a:r>
-          </a:p>
-          <a:p>
-            <a:r>
-              <a:t>Transition: Configuration also changes the ordinary clean-condition error trade-off.</a:t>
-            </a:r>
-          </a:p>
-          <a:p>
-            <a:endParaRPr/>
-          </a:p>
-          <a:p>
-            <a:r>
-              <a:t>[Sources]</a:t>
-            </a:r>
-          </a:p>
-          <a:p>
-            <a:r>
-              <a:t>- results/figures/chapter_5/fig_forensic_tools_adversarial_accuracy_drop_heatmap.png</a:t>
-            </a:r>
-          </a:p>
-          <a:p>
-            <a:r>
-              <a:t>- results/figures/chapter_5/tab_forensic_tools_worst_cases.csv</a:t>
-            </a:r>
-          </a:p>
-          <a:p>
-            <a:r>
-              <a:t>- FAIRLab manuscript, black-box transfer heatmap embedded in the source deck</a:t>
+              <a:rPr dirty="0"/>
+              <a:t>This heatmap is the clearest publication visual for black-box transfer. I would not read every cell. The message is heterogeneity: the same </a:t>
+            </a:r>
+            <a:r>
+              <a:rPr dirty="0" err="1"/>
+              <a:t>EfficientNet</a:t>
+            </a:r>
+            <a:r>
+              <a:rPr dirty="0"/>
+              <a:t>-generated artifacts have different effects across tools and across settings of the same tool. The largest observed effects are Sigma Zero transfers on </a:t>
+            </a:r>
+            <a:r>
+              <a:rPr dirty="0" err="1"/>
+              <a:t>Excire</a:t>
+            </a:r>
+            <a:r>
+              <a:rPr dirty="0"/>
+              <a:t> D50 and D80, with drops of 20.2 and 25.8 percentage points. These are transfer results, not direct attacks on proprietary models, and they do not create a product ranking.</a:t>
+            </a:r>
+          </a:p>
+          <a:p>
+            <a:r>
+              <a:rPr b="1" dirty="0"/>
+              <a:t>Transition</a:t>
+            </a:r>
+            <a:r>
+              <a:rPr dirty="0"/>
+              <a:t>: Configuration also changes the ordinary clean-condition error trade-off.</a:t>
             </a:r>
           </a:p>
         </p:txBody>
@@ -3445,40 +3177,26 @@
           <a:lstStyle/>
           <a:p>
             <a:r>
-              <a:t>Timing: 7:00–8:05</a:t>
-            </a:r>
-          </a:p>
-          <a:p>
-            <a:r>
-              <a:t>One accuracy value is not enough. For Excire, moving from distance 20 to distance 80 reduces the missed-target rate from 12.0 to 1.4 percent. However, the false-positive rate rises from 2.6 to 15.6 percent, and OOD weapon assignment rises from 23.8 to 52.2 percent. A setting can therefore reduce silent misses while creating much more review work and more OOD routing. These rows are frozen operating profiles, not a universal ranking of products.</a:t>
-            </a:r>
-          </a:p>
-          <a:p>
-            <a:r>
-              <a:t>Transition: The separate OOD branch makes that third behavior visible.</a:t>
-            </a:r>
-          </a:p>
-          <a:p>
-            <a:endParaRPr/>
-          </a:p>
-          <a:p>
-            <a:r>
-              <a:t>[Sources]</a:t>
-            </a:r>
-          </a:p>
-          <a:p>
-            <a:r>
-              <a:t>- results/figures/chapter_5/tab_forensic_tools_clean_metrics.csv</a:t>
-            </a:r>
-          </a:p>
-          <a:p>
-            <a:r>
-              <a:t>- results/figures/chapter_5/tab_forensic_tools_ood_metrics.csv</a:t>
-            </a:r>
-          </a:p>
-          <a:p>
-            <a:r>
-              <a:t>- docs/LatexThesis/sections/07_conclusions.tex — RQ3</a:t>
+              <a:rPr dirty="0"/>
+              <a:t>One accuracy value is not enough. For </a:t>
+            </a:r>
+            <a:r>
+              <a:rPr dirty="0" err="1"/>
+              <a:t>Excire</a:t>
+            </a:r>
+            <a:r>
+              <a:rPr dirty="0"/>
+              <a:t>, moving from distance 20 to distance 80 reduces the missed-target rate from 12.0 to 1.4 percent. However, the false-positive rate rises from 2.6 to 15.6 percent, and OOD weapon assignment rises from 23.8 to 52.2 percent. A setting can therefore reduce silent misses while creating much more review work and more OOD routing. These rows are frozen operating profiles, not a universal ranking of products.</a:t>
+            </a:r>
+          </a:p>
+          <a:p>
+            <a:r>
+              <a:rPr b="1" dirty="0"/>
+              <a:t>Transition</a:t>
+            </a:r>
+            <a:r>
+              <a:rPr dirty="0"/>
+              <a:t>: The separate OOD branch makes that third behavior visible.</a:t>
             </a:r>
           </a:p>
         </p:txBody>
@@ -3704,7 +3422,7 @@
           <a:lstStyle/>
           <a:p>
             <a:fld id="{5BCAD085-E8A6-8845-BD4E-CB4CCA059FC4}" type="datetimeFigureOut">
-              <a:t>08/09/2026</a:t>
+              <a:t>09/09/2026</a:t>
             </a:fld>
             <a:endParaRPr/>
           </a:p>
@@ -3899,7 +3617,7 @@
           <a:lstStyle/>
           <a:p>
             <a:fld id="{5BCAD085-E8A6-8845-BD4E-CB4CCA059FC4}" type="datetimeFigureOut">
-              <a:t>08/09/2026</a:t>
+              <a:t>09/09/2026</a:t>
             </a:fld>
             <a:endParaRPr/>
           </a:p>
@@ -4104,7 +3822,7 @@
           <a:lstStyle/>
           <a:p>
             <a:fld id="{5BCAD085-E8A6-8845-BD4E-CB4CCA059FC4}" type="datetimeFigureOut">
-              <a:t>08/09/2026</a:t>
+              <a:t>09/09/2026</a:t>
             </a:fld>
             <a:endParaRPr/>
           </a:p>
@@ -4299,7 +4017,7 @@
           <a:lstStyle/>
           <a:p>
             <a:fld id="{5BCAD085-E8A6-8845-BD4E-CB4CCA059FC4}" type="datetimeFigureOut">
-              <a:t>08/09/2026</a:t>
+              <a:t>09/09/2026</a:t>
             </a:fld>
             <a:endParaRPr/>
           </a:p>
@@ -4568,7 +4286,7 @@
           <a:lstStyle/>
           <a:p>
             <a:fld id="{5BCAD085-E8A6-8845-BD4E-CB4CCA059FC4}" type="datetimeFigureOut">
-              <a:t>08/09/2026</a:t>
+              <a:t>09/09/2026</a:t>
             </a:fld>
             <a:endParaRPr/>
           </a:p>
@@ -4909,7 +4627,7 @@
           <a:lstStyle/>
           <a:p>
             <a:fld id="{5BCAD085-E8A6-8845-BD4E-CB4CCA059FC4}" type="datetimeFigureOut">
-              <a:t>08/09/2026</a:t>
+              <a:t>09/09/2026</a:t>
             </a:fld>
             <a:endParaRPr/>
           </a:p>
@@ -5399,7 +5117,7 @@
           <a:lstStyle/>
           <a:p>
             <a:fld id="{5BCAD085-E8A6-8845-BD4E-CB4CCA059FC4}" type="datetimeFigureOut">
-              <a:t>08/09/2026</a:t>
+              <a:t>09/09/2026</a:t>
             </a:fld>
             <a:endParaRPr/>
           </a:p>
@@ -5532,7 +5250,7 @@
           <a:lstStyle/>
           <a:p>
             <a:fld id="{5BCAD085-E8A6-8845-BD4E-CB4CCA059FC4}" type="datetimeFigureOut">
-              <a:t>08/09/2026</a:t>
+              <a:t>09/09/2026</a:t>
             </a:fld>
             <a:endParaRPr/>
           </a:p>
@@ -5638,7 +5356,7 @@
           <a:lstStyle/>
           <a:p>
             <a:fld id="{5BCAD085-E8A6-8845-BD4E-CB4CCA059FC4}" type="datetimeFigureOut">
-              <a:t>08/09/2026</a:t>
+              <a:t>09/09/2026</a:t>
             </a:fld>
             <a:endParaRPr/>
           </a:p>
@@ -5957,7 +5675,7 @@
           <a:lstStyle/>
           <a:p>
             <a:fld id="{5BCAD085-E8A6-8845-BD4E-CB4CCA059FC4}" type="datetimeFigureOut">
-              <a:t>08/09/2026</a:t>
+              <a:t>09/09/2026</a:t>
             </a:fld>
             <a:endParaRPr/>
           </a:p>
@@ -6239,7 +5957,7 @@
           <a:lstStyle/>
           <a:p>
             <a:fld id="{5BCAD085-E8A6-8845-BD4E-CB4CCA059FC4}" type="datetimeFigureOut">
-              <a:t>08/09/2026</a:t>
+              <a:t>09/09/2026</a:t>
             </a:fld>
             <a:endParaRPr/>
           </a:p>
@@ -6478,7 +6196,7 @@
           </a:lstStyle>
           <a:p>
             <a:fld id="{5BCAD085-E8A6-8845-BD4E-CB4CCA059FC4}" type="datetimeFigureOut">
-              <a:t>08/09/2026</a:t>
+              <a:t>09/09/2026</a:t>
             </a:fld>
             <a:endParaRPr/>
           </a:p>
@@ -6891,7 +6609,7 @@
         </p:nvSpPr>
         <p:spPr>
           <a:xfrm>
-            <a:off x="6830568" y="0"/>
+            <a:off x="6830569" y="0"/>
             <a:ext cx="5361431" cy="6858000"/>
           </a:xfrm>
           <a:custGeom>
@@ -6966,7 +6684,7 @@
         </p:blipFill>
         <p:spPr>
           <a:xfrm>
-            <a:off x="7699248" y="4572000"/>
+            <a:off x="7787251" y="4572000"/>
             <a:ext cx="4370832" cy="1170432"/>
           </a:xfrm>
           <a:prstGeom prst="rect">
